--- a/out/ml2_demo_interrao_corporate.pptx
+++ b/out/ml2_demo_interrao_corporate.pptx
@@ -2785,6 +2785,7 @@
                         <a:srgbClr val="D9D9D9"/>
                       </a:solidFill>
                     </a:lnB>
+                    <a:noFill/>
                   </a:tcPr>
                 </a:tc>
                 <a:tc>
@@ -2821,6 +2822,7 @@
                         <a:srgbClr val="D9D9D9"/>
                       </a:solidFill>
                     </a:lnB>
+                    <a:noFill/>
                   </a:tcPr>
                 </a:tc>
                 <a:tc>
@@ -2857,6 +2859,7 @@
                         <a:srgbClr val="D9D9D9"/>
                       </a:solidFill>
                     </a:lnB>
+                    <a:noFill/>
                   </a:tcPr>
                 </a:tc>
                 <a:tc>
@@ -2893,6 +2896,7 @@
                         <a:srgbClr val="D9D9D9"/>
                       </a:solidFill>
                     </a:lnB>
+                    <a:noFill/>
                   </a:tcPr>
                 </a:tc>
                 <a:tc>
@@ -2929,6 +2933,7 @@
                         <a:srgbClr val="D9D9D9"/>
                       </a:solidFill>
                     </a:lnB>
+                    <a:noFill/>
                   </a:tcPr>
                 </a:tc>
                 <a:tc>
@@ -2965,6 +2970,7 @@
                         <a:srgbClr val="D9D9D9"/>
                       </a:solidFill>
                     </a:lnB>
+                    <a:noFill/>
                   </a:tcPr>
                 </a:tc>
               </a:tr>
@@ -3003,6 +3009,7 @@
                         <a:srgbClr val="D9D9D9"/>
                       </a:solidFill>
                     </a:lnB>
+                    <a:noFill/>
                   </a:tcPr>
                 </a:tc>
                 <a:tc>
@@ -3039,6 +3046,7 @@
                         <a:srgbClr val="D9D9D9"/>
                       </a:solidFill>
                     </a:lnB>
+                    <a:noFill/>
                   </a:tcPr>
                 </a:tc>
                 <a:tc>
@@ -3075,6 +3083,7 @@
                         <a:srgbClr val="D9D9D9"/>
                       </a:solidFill>
                     </a:lnB>
+                    <a:noFill/>
                   </a:tcPr>
                 </a:tc>
                 <a:tc>
@@ -3111,6 +3120,7 @@
                         <a:srgbClr val="D9D9D9"/>
                       </a:solidFill>
                     </a:lnB>
+                    <a:noFill/>
                   </a:tcPr>
                 </a:tc>
                 <a:tc>
@@ -3147,6 +3157,7 @@
                         <a:srgbClr val="D9D9D9"/>
                       </a:solidFill>
                     </a:lnB>
+                    <a:noFill/>
                   </a:tcPr>
                 </a:tc>
                 <a:tc>
@@ -3183,6 +3194,7 @@
                         <a:srgbClr val="D9D9D9"/>
                       </a:solidFill>
                     </a:lnB>
+                    <a:noFill/>
                   </a:tcPr>
                 </a:tc>
               </a:tr>
@@ -3221,6 +3233,7 @@
                         <a:srgbClr val="D9D9D9"/>
                       </a:solidFill>
                     </a:lnB>
+                    <a:noFill/>
                   </a:tcPr>
                 </a:tc>
                 <a:tc>
@@ -3257,6 +3270,7 @@
                         <a:srgbClr val="D9D9D9"/>
                       </a:solidFill>
                     </a:lnB>
+                    <a:noFill/>
                   </a:tcPr>
                 </a:tc>
                 <a:tc>
@@ -3293,6 +3307,7 @@
                         <a:srgbClr val="D9D9D9"/>
                       </a:solidFill>
                     </a:lnB>
+                    <a:noFill/>
                   </a:tcPr>
                 </a:tc>
                 <a:tc>
@@ -3329,6 +3344,7 @@
                         <a:srgbClr val="D9D9D9"/>
                       </a:solidFill>
                     </a:lnB>
+                    <a:noFill/>
                   </a:tcPr>
                 </a:tc>
                 <a:tc>
@@ -3365,6 +3381,7 @@
                         <a:srgbClr val="D9D9D9"/>
                       </a:solidFill>
                     </a:lnB>
+                    <a:noFill/>
                   </a:tcPr>
                 </a:tc>
                 <a:tc>
@@ -3401,6 +3418,7 @@
                         <a:srgbClr val="D9D9D9"/>
                       </a:solidFill>
                     </a:lnB>
+                    <a:noFill/>
                   </a:tcPr>
                 </a:tc>
               </a:tr>
@@ -3439,6 +3457,7 @@
                         <a:srgbClr val="D9D9D9"/>
                       </a:solidFill>
                     </a:lnB>
+                    <a:noFill/>
                   </a:tcPr>
                 </a:tc>
                 <a:tc>
@@ -3475,6 +3494,7 @@
                         <a:srgbClr val="D9D9D9"/>
                       </a:solidFill>
                     </a:lnB>
+                    <a:noFill/>
                   </a:tcPr>
                 </a:tc>
                 <a:tc>
@@ -3511,6 +3531,7 @@
                         <a:srgbClr val="D9D9D9"/>
                       </a:solidFill>
                     </a:lnB>
+                    <a:noFill/>
                   </a:tcPr>
                 </a:tc>
                 <a:tc>
@@ -3547,6 +3568,7 @@
                         <a:srgbClr val="D9D9D9"/>
                       </a:solidFill>
                     </a:lnB>
+                    <a:noFill/>
                   </a:tcPr>
                 </a:tc>
                 <a:tc>
@@ -3583,6 +3605,7 @@
                         <a:srgbClr val="D9D9D9"/>
                       </a:solidFill>
                     </a:lnB>
+                    <a:noFill/>
                   </a:tcPr>
                 </a:tc>
                 <a:tc>
@@ -3619,6 +3642,7 @@
                         <a:srgbClr val="D9D9D9"/>
                       </a:solidFill>
                     </a:lnB>
+                    <a:noFill/>
                   </a:tcPr>
                 </a:tc>
               </a:tr>
@@ -3657,6 +3681,7 @@
                         <a:srgbClr val="D9D9D9"/>
                       </a:solidFill>
                     </a:lnB>
+                    <a:noFill/>
                   </a:tcPr>
                 </a:tc>
                 <a:tc>
@@ -3693,6 +3718,7 @@
                         <a:srgbClr val="D9D9D9"/>
                       </a:solidFill>
                     </a:lnB>
+                    <a:noFill/>
                   </a:tcPr>
                 </a:tc>
                 <a:tc>
@@ -3729,6 +3755,7 @@
                         <a:srgbClr val="D9D9D9"/>
                       </a:solidFill>
                     </a:lnB>
+                    <a:noFill/>
                   </a:tcPr>
                 </a:tc>
                 <a:tc>
@@ -3765,6 +3792,7 @@
                         <a:srgbClr val="D9D9D9"/>
                       </a:solidFill>
                     </a:lnB>
+                    <a:noFill/>
                   </a:tcPr>
                 </a:tc>
                 <a:tc>
@@ -3801,6 +3829,7 @@
                         <a:srgbClr val="D9D9D9"/>
                       </a:solidFill>
                     </a:lnB>
+                    <a:noFill/>
                   </a:tcPr>
                 </a:tc>
                 <a:tc>
@@ -3837,6 +3866,7 @@
                         <a:srgbClr val="D9D9D9"/>
                       </a:solidFill>
                     </a:lnB>
+                    <a:noFill/>
                   </a:tcPr>
                 </a:tc>
               </a:tr>
@@ -3875,6 +3905,7 @@
                         <a:srgbClr val="D9D9D9"/>
                       </a:solidFill>
                     </a:lnB>
+                    <a:noFill/>
                   </a:tcPr>
                 </a:tc>
                 <a:tc>
@@ -3911,6 +3942,7 @@
                         <a:srgbClr val="D9D9D9"/>
                       </a:solidFill>
                     </a:lnB>
+                    <a:noFill/>
                   </a:tcPr>
                 </a:tc>
                 <a:tc>
@@ -3947,6 +3979,7 @@
                         <a:srgbClr val="D9D9D9"/>
                       </a:solidFill>
                     </a:lnB>
+                    <a:noFill/>
                   </a:tcPr>
                 </a:tc>
                 <a:tc>
@@ -3983,6 +4016,7 @@
                         <a:srgbClr val="D9D9D9"/>
                       </a:solidFill>
                     </a:lnB>
+                    <a:noFill/>
                   </a:tcPr>
                 </a:tc>
                 <a:tc>
@@ -4019,6 +4053,7 @@
                         <a:srgbClr val="D9D9D9"/>
                       </a:solidFill>
                     </a:lnB>
+                    <a:noFill/>
                   </a:tcPr>
                 </a:tc>
                 <a:tc>
@@ -4055,6 +4090,7 @@
                         <a:srgbClr val="D9D9D9"/>
                       </a:solidFill>
                     </a:lnB>
+                    <a:noFill/>
                   </a:tcPr>
                 </a:tc>
               </a:tr>
@@ -4093,6 +4129,7 @@
                         <a:srgbClr val="D9D9D9"/>
                       </a:solidFill>
                     </a:lnB>
+                    <a:noFill/>
                   </a:tcPr>
                 </a:tc>
                 <a:tc>
@@ -4129,6 +4166,7 @@
                         <a:srgbClr val="D9D9D9"/>
                       </a:solidFill>
                     </a:lnB>
+                    <a:noFill/>
                   </a:tcPr>
                 </a:tc>
                 <a:tc>
@@ -4165,6 +4203,7 @@
                         <a:srgbClr val="D9D9D9"/>
                       </a:solidFill>
                     </a:lnB>
+                    <a:noFill/>
                   </a:tcPr>
                 </a:tc>
                 <a:tc>
@@ -4201,6 +4240,7 @@
                         <a:srgbClr val="D9D9D9"/>
                       </a:solidFill>
                     </a:lnB>
+                    <a:noFill/>
                   </a:tcPr>
                 </a:tc>
                 <a:tc>
@@ -4237,6 +4277,7 @@
                         <a:srgbClr val="D9D9D9"/>
                       </a:solidFill>
                     </a:lnB>
+                    <a:noFill/>
                   </a:tcPr>
                 </a:tc>
                 <a:tc>
@@ -4273,6 +4314,7 @@
                         <a:srgbClr val="D9D9D9"/>
                       </a:solidFill>
                     </a:lnB>
+                    <a:noFill/>
                   </a:tcPr>
                 </a:tc>
               </a:tr>
@@ -4311,6 +4353,7 @@
                         <a:srgbClr val="D9D9D9"/>
                       </a:solidFill>
                     </a:lnB>
+                    <a:noFill/>
                   </a:tcPr>
                 </a:tc>
                 <a:tc>
@@ -4347,6 +4390,7 @@
                         <a:srgbClr val="D9D9D9"/>
                       </a:solidFill>
                     </a:lnB>
+                    <a:noFill/>
                   </a:tcPr>
                 </a:tc>
                 <a:tc>
@@ -4383,6 +4427,7 @@
                         <a:srgbClr val="D9D9D9"/>
                       </a:solidFill>
                     </a:lnB>
+                    <a:noFill/>
                   </a:tcPr>
                 </a:tc>
                 <a:tc>
@@ -4419,6 +4464,7 @@
                         <a:srgbClr val="D9D9D9"/>
                       </a:solidFill>
                     </a:lnB>
+                    <a:noFill/>
                   </a:tcPr>
                 </a:tc>
                 <a:tc>
@@ -4455,6 +4501,7 @@
                         <a:srgbClr val="D9D9D9"/>
                       </a:solidFill>
                     </a:lnB>
+                    <a:noFill/>
                   </a:tcPr>
                 </a:tc>
                 <a:tc>
@@ -4491,6 +4538,7 @@
                         <a:srgbClr val="D9D9D9"/>
                       </a:solidFill>
                     </a:lnB>
+                    <a:noFill/>
                   </a:tcPr>
                 </a:tc>
               </a:tr>
@@ -4529,6 +4577,7 @@
                         <a:srgbClr val="D9D9D9"/>
                       </a:solidFill>
                     </a:lnB>
+                    <a:noFill/>
                   </a:tcPr>
                 </a:tc>
                 <a:tc>
@@ -4565,6 +4614,7 @@
                         <a:srgbClr val="D9D9D9"/>
                       </a:solidFill>
                     </a:lnB>
+                    <a:noFill/>
                   </a:tcPr>
                 </a:tc>
                 <a:tc>
@@ -4601,6 +4651,7 @@
                         <a:srgbClr val="D9D9D9"/>
                       </a:solidFill>
                     </a:lnB>
+                    <a:noFill/>
                   </a:tcPr>
                 </a:tc>
                 <a:tc>
@@ -4637,6 +4688,7 @@
                         <a:srgbClr val="D9D9D9"/>
                       </a:solidFill>
                     </a:lnB>
+                    <a:noFill/>
                   </a:tcPr>
                 </a:tc>
                 <a:tc>
@@ -4673,6 +4725,7 @@
                         <a:srgbClr val="D9D9D9"/>
                       </a:solidFill>
                     </a:lnB>
+                    <a:noFill/>
                   </a:tcPr>
                 </a:tc>
                 <a:tc>
@@ -4709,6 +4762,7 @@
                         <a:srgbClr val="D9D9D9"/>
                       </a:solidFill>
                     </a:lnB>
+                    <a:noFill/>
                   </a:tcPr>
                 </a:tc>
               </a:tr>
@@ -4747,6 +4801,7 @@
                         <a:srgbClr val="D9D9D9"/>
                       </a:solidFill>
                     </a:lnB>
+                    <a:noFill/>
                   </a:tcPr>
                 </a:tc>
                 <a:tc>
@@ -4783,6 +4838,7 @@
                         <a:srgbClr val="D9D9D9"/>
                       </a:solidFill>
                     </a:lnB>
+                    <a:noFill/>
                   </a:tcPr>
                 </a:tc>
                 <a:tc>
@@ -4819,6 +4875,7 @@
                         <a:srgbClr val="D9D9D9"/>
                       </a:solidFill>
                     </a:lnB>
+                    <a:noFill/>
                   </a:tcPr>
                 </a:tc>
                 <a:tc>
@@ -4855,6 +4912,7 @@
                         <a:srgbClr val="D9D9D9"/>
                       </a:solidFill>
                     </a:lnB>
+                    <a:noFill/>
                   </a:tcPr>
                 </a:tc>
                 <a:tc>
@@ -4891,6 +4949,7 @@
                         <a:srgbClr val="D9D9D9"/>
                       </a:solidFill>
                     </a:lnB>
+                    <a:noFill/>
                   </a:tcPr>
                 </a:tc>
                 <a:tc>
@@ -4927,6 +4986,7 @@
                         <a:srgbClr val="D9D9D9"/>
                       </a:solidFill>
                     </a:lnB>
+                    <a:noFill/>
                   </a:tcPr>
                 </a:tc>
               </a:tr>
@@ -4965,6 +5025,7 @@
                         <a:srgbClr val="D9D9D9"/>
                       </a:solidFill>
                     </a:lnB>
+                    <a:noFill/>
                   </a:tcPr>
                 </a:tc>
                 <a:tc>
@@ -5001,6 +5062,7 @@
                         <a:srgbClr val="D9D9D9"/>
                       </a:solidFill>
                     </a:lnB>
+                    <a:noFill/>
                   </a:tcPr>
                 </a:tc>
                 <a:tc>
@@ -5037,6 +5099,7 @@
                         <a:srgbClr val="D9D9D9"/>
                       </a:solidFill>
                     </a:lnB>
+                    <a:noFill/>
                   </a:tcPr>
                 </a:tc>
                 <a:tc>
@@ -5073,6 +5136,7 @@
                         <a:srgbClr val="D9D9D9"/>
                       </a:solidFill>
                     </a:lnB>
+                    <a:noFill/>
                   </a:tcPr>
                 </a:tc>
                 <a:tc>
@@ -5109,6 +5173,7 @@
                         <a:srgbClr val="D9D9D9"/>
                       </a:solidFill>
                     </a:lnB>
+                    <a:noFill/>
                   </a:tcPr>
                 </a:tc>
                 <a:tc>
@@ -5145,6 +5210,7 @@
                         <a:srgbClr val="D9D9D9"/>
                       </a:solidFill>
                     </a:lnB>
+                    <a:noFill/>
                   </a:tcPr>
                 </a:tc>
               </a:tr>
@@ -5210,7 +5276,7 @@
         </p:nvGraphicFramePr>
         <p:xfrm>
           <a:off x="548457" y="884890"/>
-          <a:ext cx="12219181" cy="3176016"/>
+          <a:ext cx="9055020" cy="3176016"/>
         </p:xfrm>
         <a:graphic>
           <a:graphicData uri="http://schemas.openxmlformats.org/drawingml/2006/table">
@@ -5219,12 +5285,12 @@
                 <a:tableStyleId>{2D5ABB26-0587-4C30-8999-92F81FD0307C}</a:tableStyleId>
               </a:tblPr>
               <a:tblGrid>
-                <a:gridCol w="5587852"/>
-                <a:gridCol w="1854756"/>
-                <a:gridCol w="1061695"/>
-                <a:gridCol w="1233219"/>
-                <a:gridCol w="1061695"/>
-                <a:gridCol w="1419964"/>
+                <a:gridCol w="4140875"/>
+                <a:gridCol w="1374466"/>
+                <a:gridCol w="786768"/>
+                <a:gridCol w="913876"/>
+                <a:gridCol w="786768"/>
+                <a:gridCol w="1052267"/>
               </a:tblGrid>
               <a:tr h="264668">
                 <a:tc>
@@ -5503,6 +5569,7 @@
                         <a:srgbClr val="D9D9D9"/>
                       </a:solidFill>
                     </a:lnB>
+                    <a:noFill/>
                   </a:tcPr>
                 </a:tc>
                 <a:tc>
@@ -5539,6 +5606,7 @@
                         <a:srgbClr val="D9D9D9"/>
                       </a:solidFill>
                     </a:lnB>
+                    <a:noFill/>
                   </a:tcPr>
                 </a:tc>
                 <a:tc>
@@ -5575,6 +5643,7 @@
                         <a:srgbClr val="D9D9D9"/>
                       </a:solidFill>
                     </a:lnB>
+                    <a:noFill/>
                   </a:tcPr>
                 </a:tc>
                 <a:tc>
@@ -5611,6 +5680,7 @@
                         <a:srgbClr val="D9D9D9"/>
                       </a:solidFill>
                     </a:lnB>
+                    <a:noFill/>
                   </a:tcPr>
                 </a:tc>
                 <a:tc>
@@ -5647,6 +5717,7 @@
                         <a:srgbClr val="D9D9D9"/>
                       </a:solidFill>
                     </a:lnB>
+                    <a:noFill/>
                   </a:tcPr>
                 </a:tc>
                 <a:tc>
@@ -5683,6 +5754,7 @@
                         <a:srgbClr val="D9D9D9"/>
                       </a:solidFill>
                     </a:lnB>
+                    <a:noFill/>
                   </a:tcPr>
                 </a:tc>
               </a:tr>
@@ -5721,6 +5793,7 @@
                         <a:srgbClr val="D9D9D9"/>
                       </a:solidFill>
                     </a:lnB>
+                    <a:noFill/>
                   </a:tcPr>
                 </a:tc>
                 <a:tc>
@@ -5757,6 +5830,7 @@
                         <a:srgbClr val="D9D9D9"/>
                       </a:solidFill>
                     </a:lnB>
+                    <a:noFill/>
                   </a:tcPr>
                 </a:tc>
                 <a:tc>
@@ -5793,6 +5867,7 @@
                         <a:srgbClr val="D9D9D9"/>
                       </a:solidFill>
                     </a:lnB>
+                    <a:noFill/>
                   </a:tcPr>
                 </a:tc>
                 <a:tc>
@@ -5829,6 +5904,7 @@
                         <a:srgbClr val="D9D9D9"/>
                       </a:solidFill>
                     </a:lnB>
+                    <a:noFill/>
                   </a:tcPr>
                 </a:tc>
                 <a:tc>
@@ -5865,6 +5941,7 @@
                         <a:srgbClr val="D9D9D9"/>
                       </a:solidFill>
                     </a:lnB>
+                    <a:noFill/>
                   </a:tcPr>
                 </a:tc>
                 <a:tc>
@@ -5901,6 +5978,7 @@
                         <a:srgbClr val="D9D9D9"/>
                       </a:solidFill>
                     </a:lnB>
+                    <a:noFill/>
                   </a:tcPr>
                 </a:tc>
               </a:tr>
@@ -5939,6 +6017,7 @@
                         <a:srgbClr val="D9D9D9"/>
                       </a:solidFill>
                     </a:lnB>
+                    <a:noFill/>
                   </a:tcPr>
                 </a:tc>
                 <a:tc>
@@ -5975,6 +6054,7 @@
                         <a:srgbClr val="D9D9D9"/>
                       </a:solidFill>
                     </a:lnB>
+                    <a:noFill/>
                   </a:tcPr>
                 </a:tc>
                 <a:tc>
@@ -6011,6 +6091,7 @@
                         <a:srgbClr val="D9D9D9"/>
                       </a:solidFill>
                     </a:lnB>
+                    <a:noFill/>
                   </a:tcPr>
                 </a:tc>
                 <a:tc>
@@ -6047,6 +6128,7 @@
                         <a:srgbClr val="D9D9D9"/>
                       </a:solidFill>
                     </a:lnB>
+                    <a:noFill/>
                   </a:tcPr>
                 </a:tc>
                 <a:tc>
@@ -6083,6 +6165,7 @@
                         <a:srgbClr val="D9D9D9"/>
                       </a:solidFill>
                     </a:lnB>
+                    <a:noFill/>
                   </a:tcPr>
                 </a:tc>
                 <a:tc>
@@ -6119,6 +6202,7 @@
                         <a:srgbClr val="D9D9D9"/>
                       </a:solidFill>
                     </a:lnB>
+                    <a:noFill/>
                   </a:tcPr>
                 </a:tc>
               </a:tr>
@@ -6157,6 +6241,7 @@
                         <a:srgbClr val="D9D9D9"/>
                       </a:solidFill>
                     </a:lnB>
+                    <a:noFill/>
                   </a:tcPr>
                 </a:tc>
                 <a:tc>
@@ -6193,6 +6278,7 @@
                         <a:srgbClr val="D9D9D9"/>
                       </a:solidFill>
                     </a:lnB>
+                    <a:noFill/>
                   </a:tcPr>
                 </a:tc>
                 <a:tc>
@@ -6229,6 +6315,7 @@
                         <a:srgbClr val="D9D9D9"/>
                       </a:solidFill>
                     </a:lnB>
+                    <a:noFill/>
                   </a:tcPr>
                 </a:tc>
                 <a:tc>
@@ -6265,6 +6352,7 @@
                         <a:srgbClr val="D9D9D9"/>
                       </a:solidFill>
                     </a:lnB>
+                    <a:noFill/>
                   </a:tcPr>
                 </a:tc>
                 <a:tc>
@@ -6301,6 +6389,7 @@
                         <a:srgbClr val="D9D9D9"/>
                       </a:solidFill>
                     </a:lnB>
+                    <a:noFill/>
                   </a:tcPr>
                 </a:tc>
                 <a:tc>
@@ -6337,6 +6426,7 @@
                         <a:srgbClr val="D9D9D9"/>
                       </a:solidFill>
                     </a:lnB>
+                    <a:noFill/>
                   </a:tcPr>
                 </a:tc>
               </a:tr>
@@ -6375,6 +6465,7 @@
                         <a:srgbClr val="D9D9D9"/>
                       </a:solidFill>
                     </a:lnB>
+                    <a:noFill/>
                   </a:tcPr>
                 </a:tc>
                 <a:tc>
@@ -6411,6 +6502,7 @@
                         <a:srgbClr val="D9D9D9"/>
                       </a:solidFill>
                     </a:lnB>
+                    <a:noFill/>
                   </a:tcPr>
                 </a:tc>
                 <a:tc>
@@ -6447,6 +6539,7 @@
                         <a:srgbClr val="D9D9D9"/>
                       </a:solidFill>
                     </a:lnB>
+                    <a:noFill/>
                   </a:tcPr>
                 </a:tc>
                 <a:tc>
@@ -6483,6 +6576,7 @@
                         <a:srgbClr val="D9D9D9"/>
                       </a:solidFill>
                     </a:lnB>
+                    <a:noFill/>
                   </a:tcPr>
                 </a:tc>
                 <a:tc>
@@ -6519,6 +6613,7 @@
                         <a:srgbClr val="D9D9D9"/>
                       </a:solidFill>
                     </a:lnB>
+                    <a:noFill/>
                   </a:tcPr>
                 </a:tc>
                 <a:tc>
@@ -6555,6 +6650,7 @@
                         <a:srgbClr val="D9D9D9"/>
                       </a:solidFill>
                     </a:lnB>
+                    <a:noFill/>
                   </a:tcPr>
                 </a:tc>
               </a:tr>
@@ -6593,6 +6689,7 @@
                         <a:srgbClr val="D9D9D9"/>
                       </a:solidFill>
                     </a:lnB>
+                    <a:noFill/>
                   </a:tcPr>
                 </a:tc>
                 <a:tc>
@@ -6629,6 +6726,7 @@
                         <a:srgbClr val="D9D9D9"/>
                       </a:solidFill>
                     </a:lnB>
+                    <a:noFill/>
                   </a:tcPr>
                 </a:tc>
                 <a:tc>
@@ -6665,6 +6763,7 @@
                         <a:srgbClr val="D9D9D9"/>
                       </a:solidFill>
                     </a:lnB>
+                    <a:noFill/>
                   </a:tcPr>
                 </a:tc>
                 <a:tc>
@@ -6701,6 +6800,7 @@
                         <a:srgbClr val="D9D9D9"/>
                       </a:solidFill>
                     </a:lnB>
+                    <a:noFill/>
                   </a:tcPr>
                 </a:tc>
                 <a:tc>
@@ -6737,6 +6837,7 @@
                         <a:srgbClr val="D9D9D9"/>
                       </a:solidFill>
                     </a:lnB>
+                    <a:noFill/>
                   </a:tcPr>
                 </a:tc>
                 <a:tc>
@@ -6773,6 +6874,7 @@
                         <a:srgbClr val="D9D9D9"/>
                       </a:solidFill>
                     </a:lnB>
+                    <a:noFill/>
                   </a:tcPr>
                 </a:tc>
               </a:tr>
@@ -6811,6 +6913,7 @@
                         <a:srgbClr val="D9D9D9"/>
                       </a:solidFill>
                     </a:lnB>
+                    <a:noFill/>
                   </a:tcPr>
                 </a:tc>
                 <a:tc>
@@ -6847,6 +6950,7 @@
                         <a:srgbClr val="D9D9D9"/>
                       </a:solidFill>
                     </a:lnB>
+                    <a:noFill/>
                   </a:tcPr>
                 </a:tc>
                 <a:tc>
@@ -6883,6 +6987,7 @@
                         <a:srgbClr val="D9D9D9"/>
                       </a:solidFill>
                     </a:lnB>
+                    <a:noFill/>
                   </a:tcPr>
                 </a:tc>
                 <a:tc>
@@ -6919,6 +7024,7 @@
                         <a:srgbClr val="D9D9D9"/>
                       </a:solidFill>
                     </a:lnB>
+                    <a:noFill/>
                   </a:tcPr>
                 </a:tc>
                 <a:tc>
@@ -6955,6 +7061,7 @@
                         <a:srgbClr val="D9D9D9"/>
                       </a:solidFill>
                     </a:lnB>
+                    <a:noFill/>
                   </a:tcPr>
                 </a:tc>
                 <a:tc>
@@ -6991,6 +7098,7 @@
                         <a:srgbClr val="D9D9D9"/>
                       </a:solidFill>
                     </a:lnB>
+                    <a:noFill/>
                   </a:tcPr>
                 </a:tc>
               </a:tr>
@@ -7029,6 +7137,7 @@
                         <a:srgbClr val="D9D9D9"/>
                       </a:solidFill>
                     </a:lnB>
+                    <a:noFill/>
                   </a:tcPr>
                 </a:tc>
                 <a:tc>
@@ -7065,6 +7174,7 @@
                         <a:srgbClr val="D9D9D9"/>
                       </a:solidFill>
                     </a:lnB>
+                    <a:noFill/>
                   </a:tcPr>
                 </a:tc>
                 <a:tc>
@@ -7101,6 +7211,7 @@
                         <a:srgbClr val="D9D9D9"/>
                       </a:solidFill>
                     </a:lnB>
+                    <a:noFill/>
                   </a:tcPr>
                 </a:tc>
                 <a:tc>
@@ -7137,6 +7248,7 @@
                         <a:srgbClr val="D9D9D9"/>
                       </a:solidFill>
                     </a:lnB>
+                    <a:noFill/>
                   </a:tcPr>
                 </a:tc>
                 <a:tc>
@@ -7173,6 +7285,7 @@
                         <a:srgbClr val="D9D9D9"/>
                       </a:solidFill>
                     </a:lnB>
+                    <a:noFill/>
                   </a:tcPr>
                 </a:tc>
                 <a:tc>
@@ -7209,6 +7322,7 @@
                         <a:srgbClr val="D9D9D9"/>
                       </a:solidFill>
                     </a:lnB>
+                    <a:noFill/>
                   </a:tcPr>
                 </a:tc>
               </a:tr>
@@ -7247,6 +7361,7 @@
                         <a:srgbClr val="D9D9D9"/>
                       </a:solidFill>
                     </a:lnB>
+                    <a:noFill/>
                   </a:tcPr>
                 </a:tc>
                 <a:tc>
@@ -7283,6 +7398,7 @@
                         <a:srgbClr val="D9D9D9"/>
                       </a:solidFill>
                     </a:lnB>
+                    <a:noFill/>
                   </a:tcPr>
                 </a:tc>
                 <a:tc>
@@ -7319,6 +7435,7 @@
                         <a:srgbClr val="D9D9D9"/>
                       </a:solidFill>
                     </a:lnB>
+                    <a:noFill/>
                   </a:tcPr>
                 </a:tc>
                 <a:tc>
@@ -7355,6 +7472,7 @@
                         <a:srgbClr val="D9D9D9"/>
                       </a:solidFill>
                     </a:lnB>
+                    <a:noFill/>
                   </a:tcPr>
                 </a:tc>
                 <a:tc>
@@ -7391,6 +7509,7 @@
                         <a:srgbClr val="D9D9D9"/>
                       </a:solidFill>
                     </a:lnB>
+                    <a:noFill/>
                   </a:tcPr>
                 </a:tc>
                 <a:tc>
@@ -7427,6 +7546,7 @@
                         <a:srgbClr val="D9D9D9"/>
                       </a:solidFill>
                     </a:lnB>
+                    <a:noFill/>
                   </a:tcPr>
                 </a:tc>
               </a:tr>
@@ -7465,6 +7585,7 @@
                         <a:srgbClr val="D9D9D9"/>
                       </a:solidFill>
                     </a:lnB>
+                    <a:noFill/>
                   </a:tcPr>
                 </a:tc>
                 <a:tc>
@@ -7501,6 +7622,7 @@
                         <a:srgbClr val="D9D9D9"/>
                       </a:solidFill>
                     </a:lnB>
+                    <a:noFill/>
                   </a:tcPr>
                 </a:tc>
                 <a:tc>
@@ -7537,6 +7659,7 @@
                         <a:srgbClr val="D9D9D9"/>
                       </a:solidFill>
                     </a:lnB>
+                    <a:noFill/>
                   </a:tcPr>
                 </a:tc>
                 <a:tc>
@@ -7573,6 +7696,7 @@
                         <a:srgbClr val="D9D9D9"/>
                       </a:solidFill>
                     </a:lnB>
+                    <a:noFill/>
                   </a:tcPr>
                 </a:tc>
                 <a:tc>
@@ -7609,6 +7733,7 @@
                         <a:srgbClr val="D9D9D9"/>
                       </a:solidFill>
                     </a:lnB>
+                    <a:noFill/>
                   </a:tcPr>
                 </a:tc>
                 <a:tc>
@@ -7645,6 +7770,7 @@
                         <a:srgbClr val="D9D9D9"/>
                       </a:solidFill>
                     </a:lnB>
+                    <a:noFill/>
                   </a:tcPr>
                 </a:tc>
               </a:tr>
@@ -7683,6 +7809,7 @@
                         <a:srgbClr val="D9D9D9"/>
                       </a:solidFill>
                     </a:lnB>
+                    <a:noFill/>
                   </a:tcPr>
                 </a:tc>
                 <a:tc>
@@ -7719,6 +7846,7 @@
                         <a:srgbClr val="D9D9D9"/>
                       </a:solidFill>
                     </a:lnB>
+                    <a:noFill/>
                   </a:tcPr>
                 </a:tc>
                 <a:tc>
@@ -7755,6 +7883,7 @@
                         <a:srgbClr val="D9D9D9"/>
                       </a:solidFill>
                     </a:lnB>
+                    <a:noFill/>
                   </a:tcPr>
                 </a:tc>
                 <a:tc>
@@ -7791,6 +7920,7 @@
                         <a:srgbClr val="D9D9D9"/>
                       </a:solidFill>
                     </a:lnB>
+                    <a:noFill/>
                   </a:tcPr>
                 </a:tc>
                 <a:tc>
@@ -7827,6 +7957,7 @@
                         <a:srgbClr val="D9D9D9"/>
                       </a:solidFill>
                     </a:lnB>
+                    <a:noFill/>
                   </a:tcPr>
                 </a:tc>
                 <a:tc>
@@ -7863,6 +7994,7 @@
                         <a:srgbClr val="D9D9D9"/>
                       </a:solidFill>
                     </a:lnB>
+                    <a:noFill/>
                   </a:tcPr>
                 </a:tc>
               </a:tr>
@@ -8430,7 +8562,7 @@
         </p:nvGraphicFramePr>
         <p:xfrm>
           <a:off x="548457" y="884890"/>
-          <a:ext cx="12219181" cy="4000992"/>
+          <a:ext cx="11914297" cy="4000992"/>
         </p:xfrm>
         <a:graphic>
           <a:graphicData uri="http://schemas.openxmlformats.org/drawingml/2006/table">
@@ -8439,14 +8571,14 @@
                 <a:tableStyleId>{2D5ABB26-0587-4C30-8999-92F81FD0307C}</a:tableStyleId>
               </a:tblPr>
               <a:tblGrid>
-                <a:gridCol w="459273"/>
-                <a:gridCol w="2236262"/>
-                <a:gridCol w="1577427"/>
-                <a:gridCol w="1588029"/>
-                <a:gridCol w="1873969"/>
-                <a:gridCol w="1003313"/>
-                <a:gridCol w="1372541"/>
-                <a:gridCol w="2108367"/>
+                <a:gridCol w="447813"/>
+                <a:gridCol w="2180465"/>
+                <a:gridCol w="1538068"/>
+                <a:gridCol w="1548406"/>
+                <a:gridCol w="1827212"/>
+                <a:gridCol w="978279"/>
+                <a:gridCol w="1338294"/>
+                <a:gridCol w="2055760"/>
               </a:tblGrid>
               <a:tr h="250062">
                 <a:tc>
@@ -8805,6 +8937,7 @@
                         <a:srgbClr val="D9D9D9"/>
                       </a:solidFill>
                     </a:lnB>
+                    <a:noFill/>
                   </a:tcPr>
                 </a:tc>
                 <a:tc>
@@ -8841,6 +8974,7 @@
                         <a:srgbClr val="D9D9D9"/>
                       </a:solidFill>
                     </a:lnB>
+                    <a:noFill/>
                   </a:tcPr>
                 </a:tc>
                 <a:tc>
@@ -8877,6 +9011,7 @@
                         <a:srgbClr val="D9D9D9"/>
                       </a:solidFill>
                     </a:lnB>
+                    <a:noFill/>
                   </a:tcPr>
                 </a:tc>
                 <a:tc>
@@ -8913,6 +9048,7 @@
                         <a:srgbClr val="D9D9D9"/>
                       </a:solidFill>
                     </a:lnB>
+                    <a:noFill/>
                   </a:tcPr>
                 </a:tc>
                 <a:tc>
@@ -8949,6 +9085,7 @@
                         <a:srgbClr val="D9D9D9"/>
                       </a:solidFill>
                     </a:lnB>
+                    <a:noFill/>
                   </a:tcPr>
                 </a:tc>
                 <a:tc>
@@ -8985,6 +9122,7 @@
                         <a:srgbClr val="D9D9D9"/>
                       </a:solidFill>
                     </a:lnB>
+                    <a:noFill/>
                   </a:tcPr>
                 </a:tc>
                 <a:tc>
@@ -9021,6 +9159,7 @@
                         <a:srgbClr val="D9D9D9"/>
                       </a:solidFill>
                     </a:lnB>
+                    <a:noFill/>
                   </a:tcPr>
                 </a:tc>
                 <a:tc>
@@ -9057,6 +9196,7 @@
                         <a:srgbClr val="D9D9D9"/>
                       </a:solidFill>
                     </a:lnB>
+                    <a:noFill/>
                   </a:tcPr>
                 </a:tc>
               </a:tr>
@@ -9095,6 +9235,7 @@
                         <a:srgbClr val="D9D9D9"/>
                       </a:solidFill>
                     </a:lnB>
+                    <a:noFill/>
                   </a:tcPr>
                 </a:tc>
                 <a:tc>
@@ -9131,6 +9272,7 @@
                         <a:srgbClr val="D9D9D9"/>
                       </a:solidFill>
                     </a:lnB>
+                    <a:noFill/>
                   </a:tcPr>
                 </a:tc>
                 <a:tc>
@@ -9167,6 +9309,7 @@
                         <a:srgbClr val="D9D9D9"/>
                       </a:solidFill>
                     </a:lnB>
+                    <a:noFill/>
                   </a:tcPr>
                 </a:tc>
                 <a:tc>
@@ -9203,6 +9346,7 @@
                         <a:srgbClr val="D9D9D9"/>
                       </a:solidFill>
                     </a:lnB>
+                    <a:noFill/>
                   </a:tcPr>
                 </a:tc>
                 <a:tc>
@@ -9239,6 +9383,7 @@
                         <a:srgbClr val="D9D9D9"/>
                       </a:solidFill>
                     </a:lnB>
+                    <a:noFill/>
                   </a:tcPr>
                 </a:tc>
                 <a:tc>
@@ -9275,6 +9420,7 @@
                         <a:srgbClr val="D9D9D9"/>
                       </a:solidFill>
                     </a:lnB>
+                    <a:noFill/>
                   </a:tcPr>
                 </a:tc>
                 <a:tc>
@@ -9311,6 +9457,7 @@
                         <a:srgbClr val="D9D9D9"/>
                       </a:solidFill>
                     </a:lnB>
+                    <a:noFill/>
                   </a:tcPr>
                 </a:tc>
                 <a:tc>
@@ -9347,6 +9494,7 @@
                         <a:srgbClr val="D9D9D9"/>
                       </a:solidFill>
                     </a:lnB>
+                    <a:noFill/>
                   </a:tcPr>
                 </a:tc>
               </a:tr>
@@ -9385,6 +9533,7 @@
                         <a:srgbClr val="D9D9D9"/>
                       </a:solidFill>
                     </a:lnB>
+                    <a:noFill/>
                   </a:tcPr>
                 </a:tc>
                 <a:tc>
@@ -9421,6 +9570,7 @@
                         <a:srgbClr val="D9D9D9"/>
                       </a:solidFill>
                     </a:lnB>
+                    <a:noFill/>
                   </a:tcPr>
                 </a:tc>
                 <a:tc>
@@ -9457,6 +9607,7 @@
                         <a:srgbClr val="D9D9D9"/>
                       </a:solidFill>
                     </a:lnB>
+                    <a:noFill/>
                   </a:tcPr>
                 </a:tc>
                 <a:tc>
@@ -9493,6 +9644,7 @@
                         <a:srgbClr val="D9D9D9"/>
                       </a:solidFill>
                     </a:lnB>
+                    <a:noFill/>
                   </a:tcPr>
                 </a:tc>
                 <a:tc>
@@ -9529,6 +9681,7 @@
                         <a:srgbClr val="D9D9D9"/>
                       </a:solidFill>
                     </a:lnB>
+                    <a:noFill/>
                   </a:tcPr>
                 </a:tc>
                 <a:tc>
@@ -9565,6 +9718,7 @@
                         <a:srgbClr val="D9D9D9"/>
                       </a:solidFill>
                     </a:lnB>
+                    <a:noFill/>
                   </a:tcPr>
                 </a:tc>
                 <a:tc>
@@ -9601,6 +9755,7 @@
                         <a:srgbClr val="D9D9D9"/>
                       </a:solidFill>
                     </a:lnB>
+                    <a:noFill/>
                   </a:tcPr>
                 </a:tc>
                 <a:tc>
@@ -9637,6 +9792,7 @@
                         <a:srgbClr val="D9D9D9"/>
                       </a:solidFill>
                     </a:lnB>
+                    <a:noFill/>
                   </a:tcPr>
                 </a:tc>
               </a:tr>
@@ -9675,6 +9831,7 @@
                         <a:srgbClr val="D9D9D9"/>
                       </a:solidFill>
                     </a:lnB>
+                    <a:noFill/>
                   </a:tcPr>
                 </a:tc>
                 <a:tc>
@@ -9711,6 +9868,7 @@
                         <a:srgbClr val="D9D9D9"/>
                       </a:solidFill>
                     </a:lnB>
+                    <a:noFill/>
                   </a:tcPr>
                 </a:tc>
                 <a:tc>
@@ -9747,6 +9905,7 @@
                         <a:srgbClr val="D9D9D9"/>
                       </a:solidFill>
                     </a:lnB>
+                    <a:noFill/>
                   </a:tcPr>
                 </a:tc>
                 <a:tc>
@@ -9783,6 +9942,7 @@
                         <a:srgbClr val="D9D9D9"/>
                       </a:solidFill>
                     </a:lnB>
+                    <a:noFill/>
                   </a:tcPr>
                 </a:tc>
                 <a:tc>
@@ -9819,6 +9979,7 @@
                         <a:srgbClr val="D9D9D9"/>
                       </a:solidFill>
                     </a:lnB>
+                    <a:noFill/>
                   </a:tcPr>
                 </a:tc>
                 <a:tc>
@@ -9855,6 +10016,7 @@
                         <a:srgbClr val="D9D9D9"/>
                       </a:solidFill>
                     </a:lnB>
+                    <a:noFill/>
                   </a:tcPr>
                 </a:tc>
                 <a:tc>
@@ -9891,6 +10053,7 @@
                         <a:srgbClr val="D9D9D9"/>
                       </a:solidFill>
                     </a:lnB>
+                    <a:noFill/>
                   </a:tcPr>
                 </a:tc>
                 <a:tc>
@@ -9927,6 +10090,7 @@
                         <a:srgbClr val="D9D9D9"/>
                       </a:solidFill>
                     </a:lnB>
+                    <a:noFill/>
                   </a:tcPr>
                 </a:tc>
               </a:tr>
@@ -9965,6 +10129,7 @@
                         <a:srgbClr val="D9D9D9"/>
                       </a:solidFill>
                     </a:lnB>
+                    <a:noFill/>
                   </a:tcPr>
                 </a:tc>
                 <a:tc>
@@ -10001,6 +10166,7 @@
                         <a:srgbClr val="D9D9D9"/>
                       </a:solidFill>
                     </a:lnB>
+                    <a:noFill/>
                   </a:tcPr>
                 </a:tc>
                 <a:tc>
@@ -10037,6 +10203,7 @@
                         <a:srgbClr val="D9D9D9"/>
                       </a:solidFill>
                     </a:lnB>
+                    <a:noFill/>
                   </a:tcPr>
                 </a:tc>
                 <a:tc>
@@ -10073,6 +10240,7 @@
                         <a:srgbClr val="D9D9D9"/>
                       </a:solidFill>
                     </a:lnB>
+                    <a:noFill/>
                   </a:tcPr>
                 </a:tc>
                 <a:tc>
@@ -10109,6 +10277,7 @@
                         <a:srgbClr val="D9D9D9"/>
                       </a:solidFill>
                     </a:lnB>
+                    <a:noFill/>
                   </a:tcPr>
                 </a:tc>
                 <a:tc>
@@ -10145,6 +10314,7 @@
                         <a:srgbClr val="D9D9D9"/>
                       </a:solidFill>
                     </a:lnB>
+                    <a:noFill/>
                   </a:tcPr>
                 </a:tc>
                 <a:tc>
@@ -10181,6 +10351,7 @@
                         <a:srgbClr val="D9D9D9"/>
                       </a:solidFill>
                     </a:lnB>
+                    <a:noFill/>
                   </a:tcPr>
                 </a:tc>
                 <a:tc>
@@ -10217,6 +10388,7 @@
                         <a:srgbClr val="D9D9D9"/>
                       </a:solidFill>
                     </a:lnB>
+                    <a:noFill/>
                   </a:tcPr>
                 </a:tc>
               </a:tr>
@@ -10255,6 +10427,7 @@
                         <a:srgbClr val="D9D9D9"/>
                       </a:solidFill>
                     </a:lnB>
+                    <a:noFill/>
                   </a:tcPr>
                 </a:tc>
                 <a:tc>
@@ -10291,6 +10464,7 @@
                         <a:srgbClr val="D9D9D9"/>
                       </a:solidFill>
                     </a:lnB>
+                    <a:noFill/>
                   </a:tcPr>
                 </a:tc>
                 <a:tc>
@@ -10327,6 +10501,7 @@
                         <a:srgbClr val="D9D9D9"/>
                       </a:solidFill>
                     </a:lnB>
+                    <a:noFill/>
                   </a:tcPr>
                 </a:tc>
                 <a:tc>
@@ -10363,6 +10538,7 @@
                         <a:srgbClr val="D9D9D9"/>
                       </a:solidFill>
                     </a:lnB>
+                    <a:noFill/>
                   </a:tcPr>
                 </a:tc>
                 <a:tc>
@@ -10399,6 +10575,7 @@
                         <a:srgbClr val="D9D9D9"/>
                       </a:solidFill>
                     </a:lnB>
+                    <a:noFill/>
                   </a:tcPr>
                 </a:tc>
                 <a:tc>
@@ -10435,6 +10612,7 @@
                         <a:srgbClr val="D9D9D9"/>
                       </a:solidFill>
                     </a:lnB>
+                    <a:noFill/>
                   </a:tcPr>
                 </a:tc>
                 <a:tc>
@@ -10471,6 +10649,7 @@
                         <a:srgbClr val="D9D9D9"/>
                       </a:solidFill>
                     </a:lnB>
+                    <a:noFill/>
                   </a:tcPr>
                 </a:tc>
                 <a:tc>
@@ -10507,6 +10686,7 @@
                         <a:srgbClr val="D9D9D9"/>
                       </a:solidFill>
                     </a:lnB>
+                    <a:noFill/>
                   </a:tcPr>
                 </a:tc>
               </a:tr>
@@ -10545,6 +10725,7 @@
                         <a:srgbClr val="D9D9D9"/>
                       </a:solidFill>
                     </a:lnB>
+                    <a:noFill/>
                   </a:tcPr>
                 </a:tc>
                 <a:tc>
@@ -10581,6 +10762,7 @@
                         <a:srgbClr val="D9D9D9"/>
                       </a:solidFill>
                     </a:lnB>
+                    <a:noFill/>
                   </a:tcPr>
                 </a:tc>
                 <a:tc>
@@ -10617,6 +10799,7 @@
                         <a:srgbClr val="D9D9D9"/>
                       </a:solidFill>
                     </a:lnB>
+                    <a:noFill/>
                   </a:tcPr>
                 </a:tc>
                 <a:tc>
@@ -10653,6 +10836,7 @@
                         <a:srgbClr val="D9D9D9"/>
                       </a:solidFill>
                     </a:lnB>
+                    <a:noFill/>
                   </a:tcPr>
                 </a:tc>
                 <a:tc>
@@ -10689,6 +10873,7 @@
                         <a:srgbClr val="D9D9D9"/>
                       </a:solidFill>
                     </a:lnB>
+                    <a:noFill/>
                   </a:tcPr>
                 </a:tc>
                 <a:tc>
@@ -10725,6 +10910,7 @@
                         <a:srgbClr val="D9D9D9"/>
                       </a:solidFill>
                     </a:lnB>
+                    <a:noFill/>
                   </a:tcPr>
                 </a:tc>
                 <a:tc>
@@ -10761,6 +10947,7 @@
                         <a:srgbClr val="D9D9D9"/>
                       </a:solidFill>
                     </a:lnB>
+                    <a:noFill/>
                   </a:tcPr>
                 </a:tc>
                 <a:tc>
@@ -10797,6 +10984,7 @@
                         <a:srgbClr val="D9D9D9"/>
                       </a:solidFill>
                     </a:lnB>
+                    <a:noFill/>
                   </a:tcPr>
                 </a:tc>
               </a:tr>
@@ -10835,6 +11023,7 @@
                         <a:srgbClr val="D9D9D9"/>
                       </a:solidFill>
                     </a:lnB>
+                    <a:noFill/>
                   </a:tcPr>
                 </a:tc>
                 <a:tc>
@@ -10871,6 +11060,7 @@
                         <a:srgbClr val="D9D9D9"/>
                       </a:solidFill>
                     </a:lnB>
+                    <a:noFill/>
                   </a:tcPr>
                 </a:tc>
                 <a:tc>
@@ -10907,6 +11097,7 @@
                         <a:srgbClr val="D9D9D9"/>
                       </a:solidFill>
                     </a:lnB>
+                    <a:noFill/>
                   </a:tcPr>
                 </a:tc>
                 <a:tc>
@@ -10943,6 +11134,7 @@
                         <a:srgbClr val="D9D9D9"/>
                       </a:solidFill>
                     </a:lnB>
+                    <a:noFill/>
                   </a:tcPr>
                 </a:tc>
                 <a:tc>
@@ -10979,6 +11171,7 @@
                         <a:srgbClr val="D9D9D9"/>
                       </a:solidFill>
                     </a:lnB>
+                    <a:noFill/>
                   </a:tcPr>
                 </a:tc>
                 <a:tc>
@@ -11015,6 +11208,7 @@
                         <a:srgbClr val="D9D9D9"/>
                       </a:solidFill>
                     </a:lnB>
+                    <a:noFill/>
                   </a:tcPr>
                 </a:tc>
                 <a:tc>
@@ -11051,6 +11245,7 @@
                         <a:srgbClr val="D9D9D9"/>
                       </a:solidFill>
                     </a:lnB>
+                    <a:noFill/>
                   </a:tcPr>
                 </a:tc>
                 <a:tc>
@@ -11087,6 +11282,7 @@
                         <a:srgbClr val="D9D9D9"/>
                       </a:solidFill>
                     </a:lnB>
+                    <a:noFill/>
                   </a:tcPr>
                 </a:tc>
               </a:tr>
@@ -11125,6 +11321,7 @@
                         <a:srgbClr val="D9D9D9"/>
                       </a:solidFill>
                     </a:lnB>
+                    <a:noFill/>
                   </a:tcPr>
                 </a:tc>
                 <a:tc>
@@ -11161,6 +11358,7 @@
                         <a:srgbClr val="D9D9D9"/>
                       </a:solidFill>
                     </a:lnB>
+                    <a:noFill/>
                   </a:tcPr>
                 </a:tc>
                 <a:tc>
@@ -11197,6 +11395,7 @@
                         <a:srgbClr val="D9D9D9"/>
                       </a:solidFill>
                     </a:lnB>
+                    <a:noFill/>
                   </a:tcPr>
                 </a:tc>
                 <a:tc>
@@ -11233,6 +11432,7 @@
                         <a:srgbClr val="D9D9D9"/>
                       </a:solidFill>
                     </a:lnB>
+                    <a:noFill/>
                   </a:tcPr>
                 </a:tc>
                 <a:tc>
@@ -11269,6 +11469,7 @@
                         <a:srgbClr val="D9D9D9"/>
                       </a:solidFill>
                     </a:lnB>
+                    <a:noFill/>
                   </a:tcPr>
                 </a:tc>
                 <a:tc>
@@ -11305,6 +11506,7 @@
                         <a:srgbClr val="D9D9D9"/>
                       </a:solidFill>
                     </a:lnB>
+                    <a:noFill/>
                   </a:tcPr>
                 </a:tc>
                 <a:tc>
@@ -11341,6 +11543,7 @@
                         <a:srgbClr val="D9D9D9"/>
                       </a:solidFill>
                     </a:lnB>
+                    <a:noFill/>
                   </a:tcPr>
                 </a:tc>
                 <a:tc>
@@ -11377,6 +11580,7 @@
                         <a:srgbClr val="D9D9D9"/>
                       </a:solidFill>
                     </a:lnB>
+                    <a:noFill/>
                   </a:tcPr>
                 </a:tc>
               </a:tr>
@@ -11415,6 +11619,7 @@
                         <a:srgbClr val="D9D9D9"/>
                       </a:solidFill>
                     </a:lnB>
+                    <a:noFill/>
                   </a:tcPr>
                 </a:tc>
                 <a:tc>
@@ -11451,6 +11656,7 @@
                         <a:srgbClr val="D9D9D9"/>
                       </a:solidFill>
                     </a:lnB>
+                    <a:noFill/>
                   </a:tcPr>
                 </a:tc>
                 <a:tc>
@@ -11487,6 +11693,7 @@
                         <a:srgbClr val="D9D9D9"/>
                       </a:solidFill>
                     </a:lnB>
+                    <a:noFill/>
                   </a:tcPr>
                 </a:tc>
                 <a:tc>
@@ -11523,6 +11730,7 @@
                         <a:srgbClr val="D9D9D9"/>
                       </a:solidFill>
                     </a:lnB>
+                    <a:noFill/>
                   </a:tcPr>
                 </a:tc>
                 <a:tc>
@@ -11559,6 +11767,7 @@
                         <a:srgbClr val="D9D9D9"/>
                       </a:solidFill>
                     </a:lnB>
+                    <a:noFill/>
                   </a:tcPr>
                 </a:tc>
                 <a:tc>
@@ -11595,6 +11804,7 @@
                         <a:srgbClr val="D9D9D9"/>
                       </a:solidFill>
                     </a:lnB>
+                    <a:noFill/>
                   </a:tcPr>
                 </a:tc>
                 <a:tc>
@@ -11631,6 +11841,7 @@
                         <a:srgbClr val="D9D9D9"/>
                       </a:solidFill>
                     </a:lnB>
+                    <a:noFill/>
                   </a:tcPr>
                 </a:tc>
                 <a:tc>
@@ -11667,6 +11878,7 @@
                         <a:srgbClr val="D9D9D9"/>
                       </a:solidFill>
                     </a:lnB>
+                    <a:noFill/>
                   </a:tcPr>
                 </a:tc>
               </a:tr>
@@ -11705,6 +11917,7 @@
                         <a:srgbClr val="D9D9D9"/>
                       </a:solidFill>
                     </a:lnB>
+                    <a:noFill/>
                   </a:tcPr>
                 </a:tc>
                 <a:tc>
@@ -11741,6 +11954,7 @@
                         <a:srgbClr val="D9D9D9"/>
                       </a:solidFill>
                     </a:lnB>
+                    <a:noFill/>
                   </a:tcPr>
                 </a:tc>
                 <a:tc>
@@ -11777,6 +11991,7 @@
                         <a:srgbClr val="D9D9D9"/>
                       </a:solidFill>
                     </a:lnB>
+                    <a:noFill/>
                   </a:tcPr>
                 </a:tc>
                 <a:tc>
@@ -11813,6 +12028,7 @@
                         <a:srgbClr val="D9D9D9"/>
                       </a:solidFill>
                     </a:lnB>
+                    <a:noFill/>
                   </a:tcPr>
                 </a:tc>
                 <a:tc>
@@ -11849,6 +12065,7 @@
                         <a:srgbClr val="D9D9D9"/>
                       </a:solidFill>
                     </a:lnB>
+                    <a:noFill/>
                   </a:tcPr>
                 </a:tc>
                 <a:tc>
@@ -11885,6 +12102,7 @@
                         <a:srgbClr val="D9D9D9"/>
                       </a:solidFill>
                     </a:lnB>
+                    <a:noFill/>
                   </a:tcPr>
                 </a:tc>
                 <a:tc>
@@ -11921,6 +12139,7 @@
                         <a:srgbClr val="D9D9D9"/>
                       </a:solidFill>
                     </a:lnB>
+                    <a:noFill/>
                   </a:tcPr>
                 </a:tc>
                 <a:tc>
@@ -11957,6 +12176,7 @@
                         <a:srgbClr val="D9D9D9"/>
                       </a:solidFill>
                     </a:lnB>
+                    <a:noFill/>
                   </a:tcPr>
                 </a:tc>
               </a:tr>
@@ -11995,6 +12215,7 @@
                         <a:srgbClr val="D9D9D9"/>
                       </a:solidFill>
                     </a:lnB>
+                    <a:noFill/>
                   </a:tcPr>
                 </a:tc>
                 <a:tc>
@@ -12031,6 +12252,7 @@
                         <a:srgbClr val="D9D9D9"/>
                       </a:solidFill>
                     </a:lnB>
+                    <a:noFill/>
                   </a:tcPr>
                 </a:tc>
                 <a:tc>
@@ -12067,6 +12289,7 @@
                         <a:srgbClr val="D9D9D9"/>
                       </a:solidFill>
                     </a:lnB>
+                    <a:noFill/>
                   </a:tcPr>
                 </a:tc>
                 <a:tc>
@@ -12103,6 +12326,7 @@
                         <a:srgbClr val="D9D9D9"/>
                       </a:solidFill>
                     </a:lnB>
+                    <a:noFill/>
                   </a:tcPr>
                 </a:tc>
                 <a:tc>
@@ -12139,6 +12363,7 @@
                         <a:srgbClr val="D9D9D9"/>
                       </a:solidFill>
                     </a:lnB>
+                    <a:noFill/>
                   </a:tcPr>
                 </a:tc>
                 <a:tc>
@@ -12175,6 +12400,7 @@
                         <a:srgbClr val="D9D9D9"/>
                       </a:solidFill>
                     </a:lnB>
+                    <a:noFill/>
                   </a:tcPr>
                 </a:tc>
                 <a:tc>
@@ -12211,6 +12437,7 @@
                         <a:srgbClr val="D9D9D9"/>
                       </a:solidFill>
                     </a:lnB>
+                    <a:noFill/>
                   </a:tcPr>
                 </a:tc>
                 <a:tc>
@@ -12247,6 +12474,7 @@
                         <a:srgbClr val="D9D9D9"/>
                       </a:solidFill>
                     </a:lnB>
+                    <a:noFill/>
                   </a:tcPr>
                 </a:tc>
               </a:tr>
@@ -12285,6 +12513,7 @@
                         <a:srgbClr val="D9D9D9"/>
                       </a:solidFill>
                     </a:lnB>
+                    <a:noFill/>
                   </a:tcPr>
                 </a:tc>
                 <a:tc>
@@ -12321,6 +12550,7 @@
                         <a:srgbClr val="D9D9D9"/>
                       </a:solidFill>
                     </a:lnB>
+                    <a:noFill/>
                   </a:tcPr>
                 </a:tc>
                 <a:tc>
@@ -12357,6 +12587,7 @@
                         <a:srgbClr val="D9D9D9"/>
                       </a:solidFill>
                     </a:lnB>
+                    <a:noFill/>
                   </a:tcPr>
                 </a:tc>
                 <a:tc>
@@ -12393,6 +12624,7 @@
                         <a:srgbClr val="D9D9D9"/>
                       </a:solidFill>
                     </a:lnB>
+                    <a:noFill/>
                   </a:tcPr>
                 </a:tc>
                 <a:tc>
@@ -12429,6 +12661,7 @@
                         <a:srgbClr val="D9D9D9"/>
                       </a:solidFill>
                     </a:lnB>
+                    <a:noFill/>
                   </a:tcPr>
                 </a:tc>
                 <a:tc>
@@ -12465,6 +12698,7 @@
                         <a:srgbClr val="D9D9D9"/>
                       </a:solidFill>
                     </a:lnB>
+                    <a:noFill/>
                   </a:tcPr>
                 </a:tc>
                 <a:tc>
@@ -12501,6 +12735,7 @@
                         <a:srgbClr val="D9D9D9"/>
                       </a:solidFill>
                     </a:lnB>
+                    <a:noFill/>
                   </a:tcPr>
                 </a:tc>
                 <a:tc>
@@ -12537,6 +12772,7 @@
                         <a:srgbClr val="D9D9D9"/>
                       </a:solidFill>
                     </a:lnB>
+                    <a:noFill/>
                   </a:tcPr>
                 </a:tc>
               </a:tr>
@@ -12575,6 +12811,7 @@
                         <a:srgbClr val="D9D9D9"/>
                       </a:solidFill>
                     </a:lnB>
+                    <a:noFill/>
                   </a:tcPr>
                 </a:tc>
                 <a:tc>
@@ -12611,6 +12848,7 @@
                         <a:srgbClr val="D9D9D9"/>
                       </a:solidFill>
                     </a:lnB>
+                    <a:noFill/>
                   </a:tcPr>
                 </a:tc>
                 <a:tc>
@@ -12647,6 +12885,7 @@
                         <a:srgbClr val="D9D9D9"/>
                       </a:solidFill>
                     </a:lnB>
+                    <a:noFill/>
                   </a:tcPr>
                 </a:tc>
                 <a:tc>
@@ -12683,6 +12922,7 @@
                         <a:srgbClr val="D9D9D9"/>
                       </a:solidFill>
                     </a:lnB>
+                    <a:noFill/>
                   </a:tcPr>
                 </a:tc>
                 <a:tc>
@@ -12719,6 +12959,7 @@
                         <a:srgbClr val="D9D9D9"/>
                       </a:solidFill>
                     </a:lnB>
+                    <a:noFill/>
                   </a:tcPr>
                 </a:tc>
                 <a:tc>
@@ -12755,6 +12996,7 @@
                         <a:srgbClr val="D9D9D9"/>
                       </a:solidFill>
                     </a:lnB>
+                    <a:noFill/>
                   </a:tcPr>
                 </a:tc>
                 <a:tc>
@@ -12791,6 +13033,7 @@
                         <a:srgbClr val="D9D9D9"/>
                       </a:solidFill>
                     </a:lnB>
+                    <a:noFill/>
                   </a:tcPr>
                 </a:tc>
                 <a:tc>
@@ -12827,6 +13070,7 @@
                         <a:srgbClr val="D9D9D9"/>
                       </a:solidFill>
                     </a:lnB>
+                    <a:noFill/>
                   </a:tcPr>
                 </a:tc>
               </a:tr>
@@ -12865,6 +13109,7 @@
                         <a:srgbClr val="D9D9D9"/>
                       </a:solidFill>
                     </a:lnB>
+                    <a:noFill/>
                   </a:tcPr>
                 </a:tc>
                 <a:tc>
@@ -12901,6 +13146,7 @@
                         <a:srgbClr val="D9D9D9"/>
                       </a:solidFill>
                     </a:lnB>
+                    <a:noFill/>
                   </a:tcPr>
                 </a:tc>
                 <a:tc>
@@ -12937,6 +13183,7 @@
                         <a:srgbClr val="D9D9D9"/>
                       </a:solidFill>
                     </a:lnB>
+                    <a:noFill/>
                   </a:tcPr>
                 </a:tc>
                 <a:tc>
@@ -12973,6 +13220,7 @@
                         <a:srgbClr val="D9D9D9"/>
                       </a:solidFill>
                     </a:lnB>
+                    <a:noFill/>
                   </a:tcPr>
                 </a:tc>
                 <a:tc>
@@ -13009,6 +13257,7 @@
                         <a:srgbClr val="D9D9D9"/>
                       </a:solidFill>
                     </a:lnB>
+                    <a:noFill/>
                   </a:tcPr>
                 </a:tc>
                 <a:tc>
@@ -13045,6 +13294,7 @@
                         <a:srgbClr val="D9D9D9"/>
                       </a:solidFill>
                     </a:lnB>
+                    <a:noFill/>
                   </a:tcPr>
                 </a:tc>
                 <a:tc>
@@ -13081,6 +13331,7 @@
                         <a:srgbClr val="D9D9D9"/>
                       </a:solidFill>
                     </a:lnB>
+                    <a:noFill/>
                   </a:tcPr>
                 </a:tc>
                 <a:tc>
@@ -13117,6 +13368,7 @@
                         <a:srgbClr val="D9D9D9"/>
                       </a:solidFill>
                     </a:lnB>
+                    <a:noFill/>
                   </a:tcPr>
                 </a:tc>
               </a:tr>
@@ -13182,7 +13434,7 @@
         </p:nvGraphicFramePr>
         <p:xfrm>
           <a:off x="548457" y="884890"/>
-          <a:ext cx="12219181" cy="4000992"/>
+          <a:ext cx="11914297" cy="4000992"/>
         </p:xfrm>
         <a:graphic>
           <a:graphicData uri="http://schemas.openxmlformats.org/drawingml/2006/table">
@@ -13191,14 +13443,14 @@
                 <a:tableStyleId>{2D5ABB26-0587-4C30-8999-92F81FD0307C}</a:tableStyleId>
               </a:tblPr>
               <a:tblGrid>
-                <a:gridCol w="459273"/>
-                <a:gridCol w="2236262"/>
-                <a:gridCol w="1577427"/>
-                <a:gridCol w="1588029"/>
-                <a:gridCol w="1873969"/>
-                <a:gridCol w="1003313"/>
-                <a:gridCol w="1372541"/>
-                <a:gridCol w="2108367"/>
+                <a:gridCol w="447813"/>
+                <a:gridCol w="2180465"/>
+                <a:gridCol w="1538068"/>
+                <a:gridCol w="1548406"/>
+                <a:gridCol w="1827212"/>
+                <a:gridCol w="978279"/>
+                <a:gridCol w="1338294"/>
+                <a:gridCol w="2055760"/>
               </a:tblGrid>
               <a:tr h="250062">
                 <a:tc>
@@ -13557,6 +13809,7 @@
                         <a:srgbClr val="D9D9D9"/>
                       </a:solidFill>
                     </a:lnB>
+                    <a:noFill/>
                   </a:tcPr>
                 </a:tc>
                 <a:tc>
@@ -13593,6 +13846,7 @@
                         <a:srgbClr val="D9D9D9"/>
                       </a:solidFill>
                     </a:lnB>
+                    <a:noFill/>
                   </a:tcPr>
                 </a:tc>
                 <a:tc>
@@ -13629,6 +13883,7 @@
                         <a:srgbClr val="D9D9D9"/>
                       </a:solidFill>
                     </a:lnB>
+                    <a:noFill/>
                   </a:tcPr>
                 </a:tc>
                 <a:tc>
@@ -13665,6 +13920,7 @@
                         <a:srgbClr val="D9D9D9"/>
                       </a:solidFill>
                     </a:lnB>
+                    <a:noFill/>
                   </a:tcPr>
                 </a:tc>
                 <a:tc>
@@ -13701,6 +13957,7 @@
                         <a:srgbClr val="D9D9D9"/>
                       </a:solidFill>
                     </a:lnB>
+                    <a:noFill/>
                   </a:tcPr>
                 </a:tc>
                 <a:tc>
@@ -13737,6 +13994,7 @@
                         <a:srgbClr val="D9D9D9"/>
                       </a:solidFill>
                     </a:lnB>
+                    <a:noFill/>
                   </a:tcPr>
                 </a:tc>
                 <a:tc>
@@ -13773,6 +14031,7 @@
                         <a:srgbClr val="D9D9D9"/>
                       </a:solidFill>
                     </a:lnB>
+                    <a:noFill/>
                   </a:tcPr>
                 </a:tc>
                 <a:tc>
@@ -13809,6 +14068,7 @@
                         <a:srgbClr val="D9D9D9"/>
                       </a:solidFill>
                     </a:lnB>
+                    <a:noFill/>
                   </a:tcPr>
                 </a:tc>
               </a:tr>
@@ -13847,6 +14107,7 @@
                         <a:srgbClr val="D9D9D9"/>
                       </a:solidFill>
                     </a:lnB>
+                    <a:noFill/>
                   </a:tcPr>
                 </a:tc>
                 <a:tc>
@@ -13883,6 +14144,7 @@
                         <a:srgbClr val="D9D9D9"/>
                       </a:solidFill>
                     </a:lnB>
+                    <a:noFill/>
                   </a:tcPr>
                 </a:tc>
                 <a:tc>
@@ -13919,6 +14181,7 @@
                         <a:srgbClr val="D9D9D9"/>
                       </a:solidFill>
                     </a:lnB>
+                    <a:noFill/>
                   </a:tcPr>
                 </a:tc>
                 <a:tc>
@@ -13955,6 +14218,7 @@
                         <a:srgbClr val="D9D9D9"/>
                       </a:solidFill>
                     </a:lnB>
+                    <a:noFill/>
                   </a:tcPr>
                 </a:tc>
                 <a:tc>
@@ -13991,6 +14255,7 @@
                         <a:srgbClr val="D9D9D9"/>
                       </a:solidFill>
                     </a:lnB>
+                    <a:noFill/>
                   </a:tcPr>
                 </a:tc>
                 <a:tc>
@@ -14027,6 +14292,7 @@
                         <a:srgbClr val="D9D9D9"/>
                       </a:solidFill>
                     </a:lnB>
+                    <a:noFill/>
                   </a:tcPr>
                 </a:tc>
                 <a:tc>
@@ -14063,6 +14329,7 @@
                         <a:srgbClr val="D9D9D9"/>
                       </a:solidFill>
                     </a:lnB>
+                    <a:noFill/>
                   </a:tcPr>
                 </a:tc>
                 <a:tc>
@@ -14099,6 +14366,7 @@
                         <a:srgbClr val="D9D9D9"/>
                       </a:solidFill>
                     </a:lnB>
+                    <a:noFill/>
                   </a:tcPr>
                 </a:tc>
               </a:tr>
@@ -14137,6 +14405,7 @@
                         <a:srgbClr val="D9D9D9"/>
                       </a:solidFill>
                     </a:lnB>
+                    <a:noFill/>
                   </a:tcPr>
                 </a:tc>
                 <a:tc>
@@ -14173,6 +14442,7 @@
                         <a:srgbClr val="D9D9D9"/>
                       </a:solidFill>
                     </a:lnB>
+                    <a:noFill/>
                   </a:tcPr>
                 </a:tc>
                 <a:tc>
@@ -14209,6 +14479,7 @@
                         <a:srgbClr val="D9D9D9"/>
                       </a:solidFill>
                     </a:lnB>
+                    <a:noFill/>
                   </a:tcPr>
                 </a:tc>
                 <a:tc>
@@ -14245,6 +14516,7 @@
                         <a:srgbClr val="D9D9D9"/>
                       </a:solidFill>
                     </a:lnB>
+                    <a:noFill/>
                   </a:tcPr>
                 </a:tc>
                 <a:tc>
@@ -14281,6 +14553,7 @@
                         <a:srgbClr val="D9D9D9"/>
                       </a:solidFill>
                     </a:lnB>
+                    <a:noFill/>
                   </a:tcPr>
                 </a:tc>
                 <a:tc>
@@ -14317,6 +14590,7 @@
                         <a:srgbClr val="D9D9D9"/>
                       </a:solidFill>
                     </a:lnB>
+                    <a:noFill/>
                   </a:tcPr>
                 </a:tc>
                 <a:tc>
@@ -14353,6 +14627,7 @@
                         <a:srgbClr val="D9D9D9"/>
                       </a:solidFill>
                     </a:lnB>
+                    <a:noFill/>
                   </a:tcPr>
                 </a:tc>
                 <a:tc>
@@ -14389,6 +14664,7 @@
                         <a:srgbClr val="D9D9D9"/>
                       </a:solidFill>
                     </a:lnB>
+                    <a:noFill/>
                   </a:tcPr>
                 </a:tc>
               </a:tr>
@@ -14427,6 +14703,7 @@
                         <a:srgbClr val="D9D9D9"/>
                       </a:solidFill>
                     </a:lnB>
+                    <a:noFill/>
                   </a:tcPr>
                 </a:tc>
                 <a:tc>
@@ -14463,6 +14740,7 @@
                         <a:srgbClr val="D9D9D9"/>
                       </a:solidFill>
                     </a:lnB>
+                    <a:noFill/>
                   </a:tcPr>
                 </a:tc>
                 <a:tc>
@@ -14499,6 +14777,7 @@
                         <a:srgbClr val="D9D9D9"/>
                       </a:solidFill>
                     </a:lnB>
+                    <a:noFill/>
                   </a:tcPr>
                 </a:tc>
                 <a:tc>
@@ -14535,6 +14814,7 @@
                         <a:srgbClr val="D9D9D9"/>
                       </a:solidFill>
                     </a:lnB>
+                    <a:noFill/>
                   </a:tcPr>
                 </a:tc>
                 <a:tc>
@@ -14571,6 +14851,7 @@
                         <a:srgbClr val="D9D9D9"/>
                       </a:solidFill>
                     </a:lnB>
+                    <a:noFill/>
                   </a:tcPr>
                 </a:tc>
                 <a:tc>
@@ -14607,6 +14888,7 @@
                         <a:srgbClr val="D9D9D9"/>
                       </a:solidFill>
                     </a:lnB>
+                    <a:noFill/>
                   </a:tcPr>
                 </a:tc>
                 <a:tc>
@@ -14643,6 +14925,7 @@
                         <a:srgbClr val="D9D9D9"/>
                       </a:solidFill>
                     </a:lnB>
+                    <a:noFill/>
                   </a:tcPr>
                 </a:tc>
                 <a:tc>
@@ -14679,6 +14962,7 @@
                         <a:srgbClr val="D9D9D9"/>
                       </a:solidFill>
                     </a:lnB>
+                    <a:noFill/>
                   </a:tcPr>
                 </a:tc>
               </a:tr>
@@ -14717,6 +15001,7 @@
                         <a:srgbClr val="D9D9D9"/>
                       </a:solidFill>
                     </a:lnB>
+                    <a:noFill/>
                   </a:tcPr>
                 </a:tc>
                 <a:tc>
@@ -14753,6 +15038,7 @@
                         <a:srgbClr val="D9D9D9"/>
                       </a:solidFill>
                     </a:lnB>
+                    <a:noFill/>
                   </a:tcPr>
                 </a:tc>
                 <a:tc>
@@ -14789,6 +15075,7 @@
                         <a:srgbClr val="D9D9D9"/>
                       </a:solidFill>
                     </a:lnB>
+                    <a:noFill/>
                   </a:tcPr>
                 </a:tc>
                 <a:tc>
@@ -14825,6 +15112,7 @@
                         <a:srgbClr val="D9D9D9"/>
                       </a:solidFill>
                     </a:lnB>
+                    <a:noFill/>
                   </a:tcPr>
                 </a:tc>
                 <a:tc>
@@ -14861,6 +15149,7 @@
                         <a:srgbClr val="D9D9D9"/>
                       </a:solidFill>
                     </a:lnB>
+                    <a:noFill/>
                   </a:tcPr>
                 </a:tc>
                 <a:tc>
@@ -14897,6 +15186,7 @@
                         <a:srgbClr val="D9D9D9"/>
                       </a:solidFill>
                     </a:lnB>
+                    <a:noFill/>
                   </a:tcPr>
                 </a:tc>
                 <a:tc>
@@ -14933,6 +15223,7 @@
                         <a:srgbClr val="D9D9D9"/>
                       </a:solidFill>
                     </a:lnB>
+                    <a:noFill/>
                   </a:tcPr>
                 </a:tc>
                 <a:tc>
@@ -14969,6 +15260,7 @@
                         <a:srgbClr val="D9D9D9"/>
                       </a:solidFill>
                     </a:lnB>
+                    <a:noFill/>
                   </a:tcPr>
                 </a:tc>
               </a:tr>
@@ -15007,6 +15299,7 @@
                         <a:srgbClr val="D9D9D9"/>
                       </a:solidFill>
                     </a:lnB>
+                    <a:noFill/>
                   </a:tcPr>
                 </a:tc>
                 <a:tc>
@@ -15043,6 +15336,7 @@
                         <a:srgbClr val="D9D9D9"/>
                       </a:solidFill>
                     </a:lnB>
+                    <a:noFill/>
                   </a:tcPr>
                 </a:tc>
                 <a:tc>
@@ -15079,6 +15373,7 @@
                         <a:srgbClr val="D9D9D9"/>
                       </a:solidFill>
                     </a:lnB>
+                    <a:noFill/>
                   </a:tcPr>
                 </a:tc>
                 <a:tc>
@@ -15115,6 +15410,7 @@
                         <a:srgbClr val="D9D9D9"/>
                       </a:solidFill>
                     </a:lnB>
+                    <a:noFill/>
                   </a:tcPr>
                 </a:tc>
                 <a:tc>
@@ -15151,6 +15447,7 @@
                         <a:srgbClr val="D9D9D9"/>
                       </a:solidFill>
                     </a:lnB>
+                    <a:noFill/>
                   </a:tcPr>
                 </a:tc>
                 <a:tc>
@@ -15187,6 +15484,7 @@
                         <a:srgbClr val="D9D9D9"/>
                       </a:solidFill>
                     </a:lnB>
+                    <a:noFill/>
                   </a:tcPr>
                 </a:tc>
                 <a:tc>
@@ -15223,6 +15521,7 @@
                         <a:srgbClr val="D9D9D9"/>
                       </a:solidFill>
                     </a:lnB>
+                    <a:noFill/>
                   </a:tcPr>
                 </a:tc>
                 <a:tc>
@@ -15259,6 +15558,7 @@
                         <a:srgbClr val="D9D9D9"/>
                       </a:solidFill>
                     </a:lnB>
+                    <a:noFill/>
                   </a:tcPr>
                 </a:tc>
               </a:tr>
@@ -15297,6 +15597,7 @@
                         <a:srgbClr val="D9D9D9"/>
                       </a:solidFill>
                     </a:lnB>
+                    <a:noFill/>
                   </a:tcPr>
                 </a:tc>
                 <a:tc>
@@ -15333,6 +15634,7 @@
                         <a:srgbClr val="D9D9D9"/>
                       </a:solidFill>
                     </a:lnB>
+                    <a:noFill/>
                   </a:tcPr>
                 </a:tc>
                 <a:tc>
@@ -15369,6 +15671,7 @@
                         <a:srgbClr val="D9D9D9"/>
                       </a:solidFill>
                     </a:lnB>
+                    <a:noFill/>
                   </a:tcPr>
                 </a:tc>
                 <a:tc>
@@ -15405,6 +15708,7 @@
                         <a:srgbClr val="D9D9D9"/>
                       </a:solidFill>
                     </a:lnB>
+                    <a:noFill/>
                   </a:tcPr>
                 </a:tc>
                 <a:tc>
@@ -15441,6 +15745,7 @@
                         <a:srgbClr val="D9D9D9"/>
                       </a:solidFill>
                     </a:lnB>
+                    <a:noFill/>
                   </a:tcPr>
                 </a:tc>
                 <a:tc>
@@ -15477,6 +15782,7 @@
                         <a:srgbClr val="D9D9D9"/>
                       </a:solidFill>
                     </a:lnB>
+                    <a:noFill/>
                   </a:tcPr>
                 </a:tc>
                 <a:tc>
@@ -15513,6 +15819,7 @@
                         <a:srgbClr val="D9D9D9"/>
                       </a:solidFill>
                     </a:lnB>
+                    <a:noFill/>
                   </a:tcPr>
                 </a:tc>
                 <a:tc>
@@ -15549,6 +15856,7 @@
                         <a:srgbClr val="D9D9D9"/>
                       </a:solidFill>
                     </a:lnB>
+                    <a:noFill/>
                   </a:tcPr>
                 </a:tc>
               </a:tr>
@@ -15587,6 +15895,7 @@
                         <a:srgbClr val="D9D9D9"/>
                       </a:solidFill>
                     </a:lnB>
+                    <a:noFill/>
                   </a:tcPr>
                 </a:tc>
                 <a:tc>
@@ -15623,6 +15932,7 @@
                         <a:srgbClr val="D9D9D9"/>
                       </a:solidFill>
                     </a:lnB>
+                    <a:noFill/>
                   </a:tcPr>
                 </a:tc>
                 <a:tc>
@@ -15659,6 +15969,7 @@
                         <a:srgbClr val="D9D9D9"/>
                       </a:solidFill>
                     </a:lnB>
+                    <a:noFill/>
                   </a:tcPr>
                 </a:tc>
                 <a:tc>
@@ -15695,6 +16006,7 @@
                         <a:srgbClr val="D9D9D9"/>
                       </a:solidFill>
                     </a:lnB>
+                    <a:noFill/>
                   </a:tcPr>
                 </a:tc>
                 <a:tc>
@@ -15731,6 +16043,7 @@
                         <a:srgbClr val="D9D9D9"/>
                       </a:solidFill>
                     </a:lnB>
+                    <a:noFill/>
                   </a:tcPr>
                 </a:tc>
                 <a:tc>
@@ -15767,6 +16080,7 @@
                         <a:srgbClr val="D9D9D9"/>
                       </a:solidFill>
                     </a:lnB>
+                    <a:noFill/>
                   </a:tcPr>
                 </a:tc>
                 <a:tc>
@@ -15803,6 +16117,7 @@
                         <a:srgbClr val="D9D9D9"/>
                       </a:solidFill>
                     </a:lnB>
+                    <a:noFill/>
                   </a:tcPr>
                 </a:tc>
                 <a:tc>
@@ -15839,6 +16154,7 @@
                         <a:srgbClr val="D9D9D9"/>
                       </a:solidFill>
                     </a:lnB>
+                    <a:noFill/>
                   </a:tcPr>
                 </a:tc>
               </a:tr>
@@ -15877,6 +16193,7 @@
                         <a:srgbClr val="D9D9D9"/>
                       </a:solidFill>
                     </a:lnB>
+                    <a:noFill/>
                   </a:tcPr>
                 </a:tc>
                 <a:tc>
@@ -15913,6 +16230,7 @@
                         <a:srgbClr val="D9D9D9"/>
                       </a:solidFill>
                     </a:lnB>
+                    <a:noFill/>
                   </a:tcPr>
                 </a:tc>
                 <a:tc>
@@ -15949,6 +16267,7 @@
                         <a:srgbClr val="D9D9D9"/>
                       </a:solidFill>
                     </a:lnB>
+                    <a:noFill/>
                   </a:tcPr>
                 </a:tc>
                 <a:tc>
@@ -15985,6 +16304,7 @@
                         <a:srgbClr val="D9D9D9"/>
                       </a:solidFill>
                     </a:lnB>
+                    <a:noFill/>
                   </a:tcPr>
                 </a:tc>
                 <a:tc>
@@ -16021,6 +16341,7 @@
                         <a:srgbClr val="D9D9D9"/>
                       </a:solidFill>
                     </a:lnB>
+                    <a:noFill/>
                   </a:tcPr>
                 </a:tc>
                 <a:tc>
@@ -16057,6 +16378,7 @@
                         <a:srgbClr val="D9D9D9"/>
                       </a:solidFill>
                     </a:lnB>
+                    <a:noFill/>
                   </a:tcPr>
                 </a:tc>
                 <a:tc>
@@ -16093,6 +16415,7 @@
                         <a:srgbClr val="D9D9D9"/>
                       </a:solidFill>
                     </a:lnB>
+                    <a:noFill/>
                   </a:tcPr>
                 </a:tc>
                 <a:tc>
@@ -16129,6 +16452,7 @@
                         <a:srgbClr val="D9D9D9"/>
                       </a:solidFill>
                     </a:lnB>
+                    <a:noFill/>
                   </a:tcPr>
                 </a:tc>
               </a:tr>
@@ -16167,6 +16491,7 @@
                         <a:srgbClr val="D9D9D9"/>
                       </a:solidFill>
                     </a:lnB>
+                    <a:noFill/>
                   </a:tcPr>
                 </a:tc>
                 <a:tc>
@@ -16203,6 +16528,7 @@
                         <a:srgbClr val="D9D9D9"/>
                       </a:solidFill>
                     </a:lnB>
+                    <a:noFill/>
                   </a:tcPr>
                 </a:tc>
                 <a:tc>
@@ -16239,6 +16565,7 @@
                         <a:srgbClr val="D9D9D9"/>
                       </a:solidFill>
                     </a:lnB>
+                    <a:noFill/>
                   </a:tcPr>
                 </a:tc>
                 <a:tc>
@@ -16275,6 +16602,7 @@
                         <a:srgbClr val="D9D9D9"/>
                       </a:solidFill>
                     </a:lnB>
+                    <a:noFill/>
                   </a:tcPr>
                 </a:tc>
                 <a:tc>
@@ -16311,6 +16639,7 @@
                         <a:srgbClr val="D9D9D9"/>
                       </a:solidFill>
                     </a:lnB>
+                    <a:noFill/>
                   </a:tcPr>
                 </a:tc>
                 <a:tc>
@@ -16347,6 +16676,7 @@
                         <a:srgbClr val="D9D9D9"/>
                       </a:solidFill>
                     </a:lnB>
+                    <a:noFill/>
                   </a:tcPr>
                 </a:tc>
                 <a:tc>
@@ -16383,6 +16713,7 @@
                         <a:srgbClr val="D9D9D9"/>
                       </a:solidFill>
                     </a:lnB>
+                    <a:noFill/>
                   </a:tcPr>
                 </a:tc>
                 <a:tc>
@@ -16419,6 +16750,7 @@
                         <a:srgbClr val="D9D9D9"/>
                       </a:solidFill>
                     </a:lnB>
+                    <a:noFill/>
                   </a:tcPr>
                 </a:tc>
               </a:tr>
@@ -16457,6 +16789,7 @@
                         <a:srgbClr val="D9D9D9"/>
                       </a:solidFill>
                     </a:lnB>
+                    <a:noFill/>
                   </a:tcPr>
                 </a:tc>
                 <a:tc>
@@ -16493,6 +16826,7 @@
                         <a:srgbClr val="D9D9D9"/>
                       </a:solidFill>
                     </a:lnB>
+                    <a:noFill/>
                   </a:tcPr>
                 </a:tc>
                 <a:tc>
@@ -16529,6 +16863,7 @@
                         <a:srgbClr val="D9D9D9"/>
                       </a:solidFill>
                     </a:lnB>
+                    <a:noFill/>
                   </a:tcPr>
                 </a:tc>
                 <a:tc>
@@ -16565,6 +16900,7 @@
                         <a:srgbClr val="D9D9D9"/>
                       </a:solidFill>
                     </a:lnB>
+                    <a:noFill/>
                   </a:tcPr>
                 </a:tc>
                 <a:tc>
@@ -16601,6 +16937,7 @@
                         <a:srgbClr val="D9D9D9"/>
                       </a:solidFill>
                     </a:lnB>
+                    <a:noFill/>
                   </a:tcPr>
                 </a:tc>
                 <a:tc>
@@ -16637,6 +16974,7 @@
                         <a:srgbClr val="D9D9D9"/>
                       </a:solidFill>
                     </a:lnB>
+                    <a:noFill/>
                   </a:tcPr>
                 </a:tc>
                 <a:tc>
@@ -16673,6 +17011,7 @@
                         <a:srgbClr val="D9D9D9"/>
                       </a:solidFill>
                     </a:lnB>
+                    <a:noFill/>
                   </a:tcPr>
                 </a:tc>
                 <a:tc>
@@ -16709,6 +17048,7 @@
                         <a:srgbClr val="D9D9D9"/>
                       </a:solidFill>
                     </a:lnB>
+                    <a:noFill/>
                   </a:tcPr>
                 </a:tc>
               </a:tr>
@@ -16747,6 +17087,7 @@
                         <a:srgbClr val="D9D9D9"/>
                       </a:solidFill>
                     </a:lnB>
+                    <a:noFill/>
                   </a:tcPr>
                 </a:tc>
                 <a:tc>
@@ -16783,6 +17124,7 @@
                         <a:srgbClr val="D9D9D9"/>
                       </a:solidFill>
                     </a:lnB>
+                    <a:noFill/>
                   </a:tcPr>
                 </a:tc>
                 <a:tc>
@@ -16819,6 +17161,7 @@
                         <a:srgbClr val="D9D9D9"/>
                       </a:solidFill>
                     </a:lnB>
+                    <a:noFill/>
                   </a:tcPr>
                 </a:tc>
                 <a:tc>
@@ -16855,6 +17198,7 @@
                         <a:srgbClr val="D9D9D9"/>
                       </a:solidFill>
                     </a:lnB>
+                    <a:noFill/>
                   </a:tcPr>
                 </a:tc>
                 <a:tc>
@@ -16891,6 +17235,7 @@
                         <a:srgbClr val="D9D9D9"/>
                       </a:solidFill>
                     </a:lnB>
+                    <a:noFill/>
                   </a:tcPr>
                 </a:tc>
                 <a:tc>
@@ -16927,6 +17272,7 @@
                         <a:srgbClr val="D9D9D9"/>
                       </a:solidFill>
                     </a:lnB>
+                    <a:noFill/>
                   </a:tcPr>
                 </a:tc>
                 <a:tc>
@@ -16963,6 +17309,7 @@
                         <a:srgbClr val="D9D9D9"/>
                       </a:solidFill>
                     </a:lnB>
+                    <a:noFill/>
                   </a:tcPr>
                 </a:tc>
                 <a:tc>
@@ -16999,6 +17346,7 @@
                         <a:srgbClr val="D9D9D9"/>
                       </a:solidFill>
                     </a:lnB>
+                    <a:noFill/>
                   </a:tcPr>
                 </a:tc>
               </a:tr>
@@ -17037,6 +17385,7 @@
                         <a:srgbClr val="D9D9D9"/>
                       </a:solidFill>
                     </a:lnB>
+                    <a:noFill/>
                   </a:tcPr>
                 </a:tc>
                 <a:tc>
@@ -17073,6 +17422,7 @@
                         <a:srgbClr val="D9D9D9"/>
                       </a:solidFill>
                     </a:lnB>
+                    <a:noFill/>
                   </a:tcPr>
                 </a:tc>
                 <a:tc>
@@ -17109,6 +17459,7 @@
                         <a:srgbClr val="D9D9D9"/>
                       </a:solidFill>
                     </a:lnB>
+                    <a:noFill/>
                   </a:tcPr>
                 </a:tc>
                 <a:tc>
@@ -17145,6 +17496,7 @@
                         <a:srgbClr val="D9D9D9"/>
                       </a:solidFill>
                     </a:lnB>
+                    <a:noFill/>
                   </a:tcPr>
                 </a:tc>
                 <a:tc>
@@ -17181,6 +17533,7 @@
                         <a:srgbClr val="D9D9D9"/>
                       </a:solidFill>
                     </a:lnB>
+                    <a:noFill/>
                   </a:tcPr>
                 </a:tc>
                 <a:tc>
@@ -17217,6 +17570,7 @@
                         <a:srgbClr val="D9D9D9"/>
                       </a:solidFill>
                     </a:lnB>
+                    <a:noFill/>
                   </a:tcPr>
                 </a:tc>
                 <a:tc>
@@ -17253,6 +17607,7 @@
                         <a:srgbClr val="D9D9D9"/>
                       </a:solidFill>
                     </a:lnB>
+                    <a:noFill/>
                   </a:tcPr>
                 </a:tc>
                 <a:tc>
@@ -17289,6 +17644,7 @@
                         <a:srgbClr val="D9D9D9"/>
                       </a:solidFill>
                     </a:lnB>
+                    <a:noFill/>
                   </a:tcPr>
                 </a:tc>
               </a:tr>
@@ -17327,6 +17683,7 @@
                         <a:srgbClr val="D9D9D9"/>
                       </a:solidFill>
                     </a:lnB>
+                    <a:noFill/>
                   </a:tcPr>
                 </a:tc>
                 <a:tc>
@@ -17363,6 +17720,7 @@
                         <a:srgbClr val="D9D9D9"/>
                       </a:solidFill>
                     </a:lnB>
+                    <a:noFill/>
                   </a:tcPr>
                 </a:tc>
                 <a:tc>
@@ -17399,6 +17757,7 @@
                         <a:srgbClr val="D9D9D9"/>
                       </a:solidFill>
                     </a:lnB>
+                    <a:noFill/>
                   </a:tcPr>
                 </a:tc>
                 <a:tc>
@@ -17435,6 +17794,7 @@
                         <a:srgbClr val="D9D9D9"/>
                       </a:solidFill>
                     </a:lnB>
+                    <a:noFill/>
                   </a:tcPr>
                 </a:tc>
                 <a:tc>
@@ -17471,6 +17831,7 @@
                         <a:srgbClr val="D9D9D9"/>
                       </a:solidFill>
                     </a:lnB>
+                    <a:noFill/>
                   </a:tcPr>
                 </a:tc>
                 <a:tc>
@@ -17507,6 +17868,7 @@
                         <a:srgbClr val="D9D9D9"/>
                       </a:solidFill>
                     </a:lnB>
+                    <a:noFill/>
                   </a:tcPr>
                 </a:tc>
                 <a:tc>
@@ -17543,6 +17905,7 @@
                         <a:srgbClr val="D9D9D9"/>
                       </a:solidFill>
                     </a:lnB>
+                    <a:noFill/>
                   </a:tcPr>
                 </a:tc>
                 <a:tc>
@@ -17579,6 +17942,7 @@
                         <a:srgbClr val="D9D9D9"/>
                       </a:solidFill>
                     </a:lnB>
+                    <a:noFill/>
                   </a:tcPr>
                 </a:tc>
               </a:tr>
@@ -17617,6 +17981,7 @@
                         <a:srgbClr val="D9D9D9"/>
                       </a:solidFill>
                     </a:lnB>
+                    <a:noFill/>
                   </a:tcPr>
                 </a:tc>
                 <a:tc>
@@ -17653,6 +18018,7 @@
                         <a:srgbClr val="D9D9D9"/>
                       </a:solidFill>
                     </a:lnB>
+                    <a:noFill/>
                   </a:tcPr>
                 </a:tc>
                 <a:tc>
@@ -17689,6 +18055,7 @@
                         <a:srgbClr val="D9D9D9"/>
                       </a:solidFill>
                     </a:lnB>
+                    <a:noFill/>
                   </a:tcPr>
                 </a:tc>
                 <a:tc>
@@ -17725,6 +18092,7 @@
                         <a:srgbClr val="D9D9D9"/>
                       </a:solidFill>
                     </a:lnB>
+                    <a:noFill/>
                   </a:tcPr>
                 </a:tc>
                 <a:tc>
@@ -17761,6 +18129,7 @@
                         <a:srgbClr val="D9D9D9"/>
                       </a:solidFill>
                     </a:lnB>
+                    <a:noFill/>
                   </a:tcPr>
                 </a:tc>
                 <a:tc>
@@ -17797,6 +18166,7 @@
                         <a:srgbClr val="D9D9D9"/>
                       </a:solidFill>
                     </a:lnB>
+                    <a:noFill/>
                   </a:tcPr>
                 </a:tc>
                 <a:tc>
@@ -17833,6 +18203,7 @@
                         <a:srgbClr val="D9D9D9"/>
                       </a:solidFill>
                     </a:lnB>
+                    <a:noFill/>
                   </a:tcPr>
                 </a:tc>
                 <a:tc>
@@ -17869,6 +18240,7 @@
                         <a:srgbClr val="D9D9D9"/>
                       </a:solidFill>
                     </a:lnB>
+                    <a:noFill/>
                   </a:tcPr>
                 </a:tc>
               </a:tr>
@@ -17927,7 +18299,7 @@
     </a:clrScheme>
     <a:fontScheme name="Тема Office">
       <a:majorFont>
-        <a:latin typeface="Calibri Light"/>
+        <a:latin typeface="Liberation Sans"/>
         <a:ea typeface=""/>
         <a:cs typeface=""/>
         <a:font script="Jpan" typeface="ＭＳ Ｐゴシック"/>
@@ -17962,7 +18334,7 @@
         <a:font script="Geor" typeface="Sylfaen"/>
       </a:majorFont>
       <a:minorFont>
-        <a:latin typeface="Calibri"/>
+        <a:latin typeface="Liberation Sans"/>
         <a:ea typeface=""/>
         <a:cs typeface=""/>
         <a:font script="Jpan" typeface="ＭＳ Ｐゴシック"/>
@@ -18188,7 +18560,7 @@
     </a:clrScheme>
     <a:fontScheme name="Стандартная">
       <a:majorFont>
-        <a:latin typeface="Calibri Light"/>
+        <a:latin typeface="Liberation Sans"/>
         <a:ea typeface=""/>
         <a:cs typeface=""/>
         <a:font script="Jpan" typeface="ＭＳ Ｐゴシック"/>
@@ -18223,7 +18595,7 @@
         <a:font script="Geor" typeface="Sylfaen"/>
       </a:majorFont>
       <a:minorFont>
-        <a:latin typeface="Calibri"/>
+        <a:latin typeface="Liberation Sans"/>
         <a:ea typeface=""/>
         <a:cs typeface=""/>
         <a:font script="Jpan" typeface="ＭＳ Ｐゴシック"/>
